--- a/modulo-01/01.05 - Trabalhando com Objetos de Dados Estruturados/01.05_Dominando_Estruturas_de_Dados_em_ABAP_e_RAP.pptx
+++ b/modulo-01/01.05 - Trabalhando com Objetos de Dados Estruturados/01.05_Dominando_Estruturas_de_Dados_em_ABAP_e_RAP.pptx
@@ -8381,7 +8381,7 @@
         </p:blipFill>
         <p:spPr>
           <a:xfrm>
-            <a:off x="5455768" y="3858768"/>
+            <a:off x="2636444" y="3858768"/>
             <a:ext cx="347472" cy="347472"/>
           </a:xfrm>
           <a:prstGeom prst="rect">
@@ -8405,7 +8405,7 @@
         </p:blipFill>
         <p:spPr>
           <a:xfrm>
-            <a:off x="2636444" y="3858768"/>
+            <a:off x="5455768" y="3858768"/>
             <a:ext cx="347472" cy="347472"/>
           </a:xfrm>
           <a:prstGeom prst="rect">
